--- a/Land_Cover_Classification_NEW.pptx
+++ b/Land_Cover_Classification_NEW.pptx
@@ -6957,7 +6957,7 @@
         </p:nvSpPr>
         <p:spPr>
           <a:xfrm>
-            <a:off x="274320" y="1234440"/>
+            <a:off x="246888" y="1234440"/>
             <a:ext cx="3474720" cy="5303520"/>
           </a:xfrm>
           <a:prstGeom prst="rect">
@@ -7080,7 +7080,7 @@
         </p:nvSpPr>
         <p:spPr>
           <a:xfrm>
-            <a:off x="502920" y="1344168"/>
+            <a:off x="548640" y="1399032"/>
             <a:ext cx="2926080" cy="384048"/>
           </a:xfrm>
           <a:prstGeom prst="rect">
@@ -7159,7 +7159,7 @@
         </p:nvSpPr>
         <p:spPr>
           <a:xfrm>
-            <a:off x="502920" y="1801368"/>
+            <a:off x="530226" y="1819656"/>
             <a:ext cx="2926080" cy="384048"/>
           </a:xfrm>
           <a:prstGeom prst="rect">
@@ -7491,7 +7491,7 @@
           <a:p>
             <a:pPr algn="ctr"/>
             <a:r>
-              <a:rPr sz="1500" b="1" i="0">
+              <a:rPr sz="1500" b="1" i="0" dirty="0">
                 <a:solidFill>
                   <a:srgbClr val="1F6FC3"/>
                 </a:solidFill>
@@ -8810,7 +8810,7 @@
         <p:spPr>
           <a:xfrm>
             <a:off x="182880" y="6492240"/>
-            <a:ext cx="8229600" cy="347472"/>
+            <a:ext cx="8229600" cy="246221"/>
           </a:xfrm>
           <a:prstGeom prst="rect">
             <a:avLst/>
@@ -8825,14 +8825,47 @@
           <a:p>
             <a:pPr algn="l"/>
             <a:r>
-              <a:rPr sz="1000" b="0" i="0">
+              <a:rPr sz="1000" b="0" i="0" dirty="0">
                 <a:solidFill>
                   <a:srgbClr val="AABBCC"/>
                 </a:solidFill>
                 <a:latin typeface="Calibri"/>
               </a:rPr>
-              <a:t>Land Cover Classification · SPbPU · 2024</a:t>
-            </a:r>
+              <a:t>Land Cover Classification · </a:t>
+            </a:r>
+            <a:r>
+              <a:rPr sz="1000" b="0" i="0" dirty="0" err="1">
+                <a:solidFill>
+                  <a:srgbClr val="AABBCC"/>
+                </a:solidFill>
+                <a:latin typeface="Calibri"/>
+              </a:rPr>
+              <a:t>SPbPU</a:t>
+            </a:r>
+            <a:r>
+              <a:rPr sz="1000" b="0" i="0" dirty="0">
+                <a:solidFill>
+                  <a:srgbClr val="AABBCC"/>
+                </a:solidFill>
+                <a:latin typeface="Calibri"/>
+              </a:rPr>
+              <a:t> · 202</a:t>
+            </a:r>
+            <a:r>
+              <a:rPr lang="en-US" sz="1000" b="0" i="0" dirty="0">
+                <a:solidFill>
+                  <a:srgbClr val="AABBCC"/>
+                </a:solidFill>
+                <a:latin typeface="Calibri"/>
+              </a:rPr>
+              <a:t>6</a:t>
+            </a:r>
+            <a:endParaRPr sz="1000" b="0" i="0" dirty="0">
+              <a:solidFill>
+                <a:srgbClr val="AABBCC"/>
+              </a:solidFill>
+              <a:latin typeface="Calibri"/>
+            </a:endParaRPr>
           </a:p>
         </p:txBody>
       </p:sp>
@@ -9139,8 +9172,8 @@
         </p:nvSpPr>
         <p:spPr>
           <a:xfrm>
-            <a:off x="182880" y="6492240"/>
-            <a:ext cx="8229600" cy="347472"/>
+            <a:off x="182880" y="6556914"/>
+            <a:ext cx="8229600" cy="246221"/>
           </a:xfrm>
           <a:prstGeom prst="rect">
             <a:avLst/>
@@ -9155,14 +9188,47 @@
           <a:p>
             <a:pPr algn="l"/>
             <a:r>
-              <a:rPr sz="1000" b="0" i="0">
+              <a:rPr sz="1000" b="0" i="0" dirty="0">
                 <a:solidFill>
                   <a:srgbClr val="AABBCC"/>
                 </a:solidFill>
                 <a:latin typeface="Calibri"/>
               </a:rPr>
-              <a:t>Land Cover Classification · SPbPU · 2024</a:t>
-            </a:r>
+              <a:t>Land Cover Classification · </a:t>
+            </a:r>
+            <a:r>
+              <a:rPr sz="1000" b="0" i="0" dirty="0" err="1">
+                <a:solidFill>
+                  <a:srgbClr val="AABBCC"/>
+                </a:solidFill>
+                <a:latin typeface="Calibri"/>
+              </a:rPr>
+              <a:t>SPbPU</a:t>
+            </a:r>
+            <a:r>
+              <a:rPr sz="1000" b="0" i="0" dirty="0">
+                <a:solidFill>
+                  <a:srgbClr val="AABBCC"/>
+                </a:solidFill>
+                <a:latin typeface="Calibri"/>
+              </a:rPr>
+              <a:t> · 202</a:t>
+            </a:r>
+            <a:r>
+              <a:rPr lang="en-US" sz="1000" b="0" i="0" dirty="0">
+                <a:solidFill>
+                  <a:srgbClr val="AABBCC"/>
+                </a:solidFill>
+                <a:latin typeface="Calibri"/>
+              </a:rPr>
+              <a:t>6</a:t>
+            </a:r>
+            <a:endParaRPr sz="1000" b="0" i="0" dirty="0">
+              <a:solidFill>
+                <a:srgbClr val="AABBCC"/>
+              </a:solidFill>
+              <a:latin typeface="Calibri"/>
+            </a:endParaRPr>
           </a:p>
         </p:txBody>
       </p:sp>
@@ -9234,7 +9300,7 @@
           <a:p>
             <a:pPr algn="l"/>
             <a:r>
-              <a:rPr sz="1200" b="1" i="0">
+              <a:rPr sz="1200" b="1" i="0" dirty="0">
                 <a:solidFill>
                   <a:srgbClr val="FFFFFF"/>
                 </a:solidFill>
@@ -9313,7 +9379,7 @@
           <a:p>
             <a:pPr algn="l"/>
             <a:r>
-              <a:rPr sz="1200" b="1" i="0">
+              <a:rPr sz="1200" b="1" i="0" dirty="0">
                 <a:solidFill>
                   <a:srgbClr val="FFFFFF"/>
                 </a:solidFill>
@@ -9455,7 +9521,7 @@
         </p:nvSpPr>
         <p:spPr>
           <a:xfrm>
-            <a:off x="365760" y="1618488"/>
+            <a:off x="365760" y="1636679"/>
             <a:ext cx="3657600" cy="274320"/>
           </a:xfrm>
           <a:prstGeom prst="rect">
@@ -9471,7 +9537,7 @@
           <a:p>
             <a:pPr algn="l"/>
             <a:r>
-              <a:rPr sz="1200" b="0" i="0">
+              <a:rPr sz="1200" b="0" i="0" dirty="0">
                 <a:solidFill>
                   <a:srgbClr val="1A1A2E"/>
                 </a:solidFill>
@@ -12781,7 +12847,7 @@
           <a:p>
             <a:pPr algn="ctr"/>
             <a:r>
-              <a:rPr sz="2600" b="1" i="0">
+              <a:rPr sz="2600" b="1" i="0" dirty="0">
                 <a:solidFill>
                   <a:srgbClr val="E88C00"/>
                 </a:solidFill>
@@ -13448,8 +13514,8 @@
         </p:nvSpPr>
         <p:spPr>
           <a:xfrm>
-            <a:off x="182880" y="6492240"/>
-            <a:ext cx="8229600" cy="347472"/>
+            <a:off x="182880" y="6583680"/>
+            <a:ext cx="8293608" cy="256032"/>
           </a:xfrm>
           <a:prstGeom prst="rect">
             <a:avLst/>
@@ -13464,13 +13530,31 @@
           <a:p>
             <a:pPr algn="l"/>
             <a:r>
-              <a:rPr sz="1000" b="0" i="0">
+              <a:rPr sz="1000" b="0" i="0" dirty="0">
                 <a:solidFill>
                   <a:srgbClr val="AABBCC"/>
                 </a:solidFill>
                 <a:latin typeface="Calibri"/>
               </a:rPr>
-              <a:t>Land Cover Classification · SPbPU · 2024</a:t>
+              <a:t>Land Cover Classification · </a:t>
+            </a:r>
+            <a:r>
+              <a:rPr sz="1000" b="0" i="0" dirty="0" err="1">
+                <a:solidFill>
+                  <a:srgbClr val="AABBCC"/>
+                </a:solidFill>
+                <a:latin typeface="Calibri"/>
+              </a:rPr>
+              <a:t>SPbPU</a:t>
+            </a:r>
+            <a:r>
+              <a:rPr sz="1000" b="0" i="0" dirty="0">
+                <a:solidFill>
+                  <a:srgbClr val="AABBCC"/>
+                </a:solidFill>
+                <a:latin typeface="Calibri"/>
+              </a:rPr>
+              <a:t> · 202</a:t>
             </a:r>
           </a:p>
         </p:txBody>
@@ -18933,7 +19017,7 @@
         <p:spPr>
           <a:xfrm>
             <a:off x="182880" y="6492240"/>
-            <a:ext cx="8229600" cy="347472"/>
+            <a:ext cx="8229600" cy="246221"/>
           </a:xfrm>
           <a:prstGeom prst="rect">
             <a:avLst/>
@@ -18948,13 +19032,31 @@
           <a:p>
             <a:pPr algn="l"/>
             <a:r>
-              <a:rPr sz="1000" b="0" i="0">
+              <a:rPr sz="1000" b="0" i="0" dirty="0">
                 <a:solidFill>
                   <a:srgbClr val="AABBCC"/>
                 </a:solidFill>
                 <a:latin typeface="Calibri"/>
               </a:rPr>
-              <a:t>Land Cover Classification · SPbPU · 2024</a:t>
+              <a:t>Land Cover Classification · </a:t>
+            </a:r>
+            <a:r>
+              <a:rPr sz="1000" b="0" i="0" dirty="0" err="1">
+                <a:solidFill>
+                  <a:srgbClr val="AABBCC"/>
+                </a:solidFill>
+                <a:latin typeface="Calibri"/>
+              </a:rPr>
+              <a:t>SPbPU</a:t>
+            </a:r>
+            <a:r>
+              <a:rPr sz="1000" b="0" i="0" dirty="0">
+                <a:solidFill>
+                  <a:srgbClr val="AABBCC"/>
+                </a:solidFill>
+                <a:latin typeface="Calibri"/>
+              </a:rPr>
+              <a:t> · 202</a:t>
             </a:r>
           </a:p>
         </p:txBody>
@@ -19489,7 +19591,7 @@
           <a:p>
             <a:pPr algn="l"/>
             <a:r>
-              <a:rPr sz="1600" b="1" i="0">
+              <a:rPr sz="1600" b="1" i="0" dirty="0">
                 <a:solidFill>
                   <a:srgbClr val="0D2B55"/>
                 </a:solidFill>
@@ -19603,7 +19705,7 @@
           <a:p>
             <a:pPr algn="l"/>
             <a:r>
-              <a:rPr sz="1600" b="1" i="0">
+              <a:rPr sz="1600" b="1" i="0" dirty="0">
                 <a:solidFill>
                   <a:srgbClr val="0D2B55"/>
                 </a:solidFill>
@@ -20088,7 +20190,7 @@
         <p:spPr>
           <a:xfrm>
             <a:off x="182880" y="6492240"/>
-            <a:ext cx="8229600" cy="347472"/>
+            <a:ext cx="8229600" cy="246221"/>
           </a:xfrm>
           <a:prstGeom prst="rect">
             <a:avLst/>
@@ -20103,14 +20205,47 @@
           <a:p>
             <a:pPr algn="l"/>
             <a:r>
-              <a:rPr sz="1000" b="0" i="0">
+              <a:rPr sz="1000" b="0" i="0" dirty="0">
                 <a:solidFill>
                   <a:srgbClr val="AABBCC"/>
                 </a:solidFill>
                 <a:latin typeface="Calibri"/>
               </a:rPr>
-              <a:t>Land Cover Classification · SPbPU · 2024</a:t>
-            </a:r>
+              <a:t>Land Cover Classification · </a:t>
+            </a:r>
+            <a:r>
+              <a:rPr sz="1000" b="0" i="0" dirty="0" err="1">
+                <a:solidFill>
+                  <a:srgbClr val="AABBCC"/>
+                </a:solidFill>
+                <a:latin typeface="Calibri"/>
+              </a:rPr>
+              <a:t>SPbPU</a:t>
+            </a:r>
+            <a:r>
+              <a:rPr sz="1000" b="0" i="0" dirty="0">
+                <a:solidFill>
+                  <a:srgbClr val="AABBCC"/>
+                </a:solidFill>
+                <a:latin typeface="Calibri"/>
+              </a:rPr>
+              <a:t> · 202</a:t>
+            </a:r>
+            <a:r>
+              <a:rPr lang="en-US" sz="1000" b="0" i="0" dirty="0">
+                <a:solidFill>
+                  <a:srgbClr val="AABBCC"/>
+                </a:solidFill>
+                <a:latin typeface="Calibri"/>
+              </a:rPr>
+              <a:t>6</a:t>
+            </a:r>
+            <a:endParaRPr sz="1000" b="0" i="0" dirty="0">
+              <a:solidFill>
+                <a:srgbClr val="AABBCC"/>
+              </a:solidFill>
+              <a:latin typeface="Calibri"/>
+            </a:endParaRPr>
           </a:p>
         </p:txBody>
       </p:sp>
@@ -21233,7 +21368,7 @@
         <p:spPr>
           <a:xfrm>
             <a:off x="182880" y="6492240"/>
-            <a:ext cx="8229600" cy="347472"/>
+            <a:ext cx="8229600" cy="246221"/>
           </a:xfrm>
           <a:prstGeom prst="rect">
             <a:avLst/>
@@ -21248,14 +21383,47 @@
           <a:p>
             <a:pPr algn="l"/>
             <a:r>
-              <a:rPr sz="1000" b="0" i="0">
+              <a:rPr sz="1000" b="0" i="0" dirty="0">
                 <a:solidFill>
                   <a:srgbClr val="AABBCC"/>
                 </a:solidFill>
                 <a:latin typeface="Calibri"/>
               </a:rPr>
-              <a:t>Land Cover Classification · SPbPU · 2024</a:t>
-            </a:r>
+              <a:t>Land Cover Classification · </a:t>
+            </a:r>
+            <a:r>
+              <a:rPr sz="1000" b="0" i="0" dirty="0" err="1">
+                <a:solidFill>
+                  <a:srgbClr val="AABBCC"/>
+                </a:solidFill>
+                <a:latin typeface="Calibri"/>
+              </a:rPr>
+              <a:t>SPbPU</a:t>
+            </a:r>
+            <a:r>
+              <a:rPr sz="1000" b="0" i="0" dirty="0">
+                <a:solidFill>
+                  <a:srgbClr val="AABBCC"/>
+                </a:solidFill>
+                <a:latin typeface="Calibri"/>
+              </a:rPr>
+              <a:t> · 202</a:t>
+            </a:r>
+            <a:r>
+              <a:rPr lang="en-US" sz="1000" b="0" i="0" dirty="0">
+                <a:solidFill>
+                  <a:srgbClr val="AABBCC"/>
+                </a:solidFill>
+                <a:latin typeface="Calibri"/>
+              </a:rPr>
+              <a:t>6</a:t>
+            </a:r>
+            <a:endParaRPr sz="1000" b="0" i="0" dirty="0">
+              <a:solidFill>
+                <a:srgbClr val="AABBCC"/>
+              </a:solidFill>
+              <a:latin typeface="Calibri"/>
+            </a:endParaRPr>
           </a:p>
         </p:txBody>
       </p:sp>
@@ -22617,7 +22785,7 @@
         <p:spPr>
           <a:xfrm>
             <a:off x="182880" y="6492240"/>
-            <a:ext cx="8229600" cy="347472"/>
+            <a:ext cx="8229600" cy="246221"/>
           </a:xfrm>
           <a:prstGeom prst="rect">
             <a:avLst/>
@@ -22632,14 +22800,47 @@
           <a:p>
             <a:pPr algn="l"/>
             <a:r>
-              <a:rPr sz="1000" b="0" i="0">
+              <a:rPr sz="1000" b="0" i="0" dirty="0">
                 <a:solidFill>
                   <a:srgbClr val="AABBCC"/>
                 </a:solidFill>
                 <a:latin typeface="Calibri"/>
               </a:rPr>
-              <a:t>Land Cover Classification · SPbPU · 2024</a:t>
-            </a:r>
+              <a:t>Land Cover Classification · </a:t>
+            </a:r>
+            <a:r>
+              <a:rPr sz="1000" b="0" i="0" dirty="0" err="1">
+                <a:solidFill>
+                  <a:srgbClr val="AABBCC"/>
+                </a:solidFill>
+                <a:latin typeface="Calibri"/>
+              </a:rPr>
+              <a:t>SPbPU</a:t>
+            </a:r>
+            <a:r>
+              <a:rPr sz="1000" b="0" i="0" dirty="0">
+                <a:solidFill>
+                  <a:srgbClr val="AABBCC"/>
+                </a:solidFill>
+                <a:latin typeface="Calibri"/>
+              </a:rPr>
+              <a:t> · 202</a:t>
+            </a:r>
+            <a:r>
+              <a:rPr lang="en-US" sz="1000" b="0" i="0" dirty="0">
+                <a:solidFill>
+                  <a:srgbClr val="AABBCC"/>
+                </a:solidFill>
+                <a:latin typeface="Calibri"/>
+              </a:rPr>
+              <a:t>6</a:t>
+            </a:r>
+            <a:endParaRPr sz="1000" b="0" i="0" dirty="0">
+              <a:solidFill>
+                <a:srgbClr val="AABBCC"/>
+              </a:solidFill>
+              <a:latin typeface="Calibri"/>
+            </a:endParaRPr>
           </a:p>
         </p:txBody>
       </p:sp>
@@ -25819,32 +26020,8 @@
         </p:blipFill>
         <p:spPr>
           <a:xfrm>
-            <a:off x="274320" y="5577840"/>
-            <a:ext cx="2077332" cy="1143000"/>
-          </a:xfrm>
-          <a:prstGeom prst="rect">
-            <a:avLst/>
-          </a:prstGeom>
-        </p:spPr>
-      </p:pic>
-      <p:pic>
-        <p:nvPicPr>
-          <p:cNvPr id="90" name="Picture 89" descr="fig5_f1_comparison.png"/>
-          <p:cNvPicPr>
-            <a:picLocks noChangeAspect="1"/>
-          </p:cNvPicPr>
-          <p:nvPr/>
-        </p:nvPicPr>
-        <p:blipFill>
-          <a:blip r:embed="rId4"/>
-          <a:stretch>
-            <a:fillRect/>
-          </a:stretch>
-        </p:blipFill>
-        <p:spPr>
-          <a:xfrm>
-            <a:off x="6217920" y="5577840"/>
-            <a:ext cx="3015774" cy="1143000"/>
+            <a:off x="1252728" y="3251720"/>
+            <a:ext cx="3054096" cy="1680440"/>
           </a:xfrm>
           <a:prstGeom prst="rect">
             <a:avLst/>
@@ -26615,7 +26792,7 @@
         <p:spPr>
           <a:xfrm>
             <a:off x="182880" y="6492240"/>
-            <a:ext cx="8229600" cy="347472"/>
+            <a:ext cx="8229600" cy="246221"/>
           </a:xfrm>
           <a:prstGeom prst="rect">
             <a:avLst/>
@@ -26630,14 +26807,47 @@
           <a:p>
             <a:pPr algn="l"/>
             <a:r>
-              <a:rPr sz="1000" b="0" i="0">
+              <a:rPr sz="1000" b="0" i="0" dirty="0">
                 <a:solidFill>
                   <a:srgbClr val="AABBCC"/>
                 </a:solidFill>
                 <a:latin typeface="Calibri"/>
               </a:rPr>
-              <a:t>Land Cover Classification · SPbPU · 2024</a:t>
-            </a:r>
+              <a:t>Land Cover Classification · </a:t>
+            </a:r>
+            <a:r>
+              <a:rPr sz="1000" b="0" i="0" dirty="0" err="1">
+                <a:solidFill>
+                  <a:srgbClr val="AABBCC"/>
+                </a:solidFill>
+                <a:latin typeface="Calibri"/>
+              </a:rPr>
+              <a:t>SPbPU</a:t>
+            </a:r>
+            <a:r>
+              <a:rPr sz="1000" b="0" i="0" dirty="0">
+                <a:solidFill>
+                  <a:srgbClr val="AABBCC"/>
+                </a:solidFill>
+                <a:latin typeface="Calibri"/>
+              </a:rPr>
+              <a:t> · 202</a:t>
+            </a:r>
+            <a:r>
+              <a:rPr lang="en-US" sz="1000" b="0" i="0" dirty="0">
+                <a:solidFill>
+                  <a:srgbClr val="AABBCC"/>
+                </a:solidFill>
+                <a:latin typeface="Calibri"/>
+              </a:rPr>
+              <a:t>6</a:t>
+            </a:r>
+            <a:endParaRPr sz="1000" b="0" i="0" dirty="0">
+              <a:solidFill>
+                <a:srgbClr val="AABBCC"/>
+              </a:solidFill>
+              <a:latin typeface="Calibri"/>
+            </a:endParaRPr>
           </a:p>
         </p:txBody>
       </p:sp>
@@ -26650,7 +26860,7 @@
         <p:spPr>
           <a:xfrm>
             <a:off x="365760" y="1234440"/>
-            <a:ext cx="5486400" cy="5029200"/>
+            <a:ext cx="5486400" cy="2744341"/>
           </a:xfrm>
           <a:prstGeom prst="rect">
             <a:avLst/>
@@ -26669,7 +26879,7 @@
               </a:spcBef>
             </a:pPr>
             <a:r>
-              <a:rPr sz="1700" b="1">
+              <a:rPr sz="1700" b="1" dirty="0" err="1">
                 <a:solidFill>
                   <a:srgbClr val="0D2B55"/>
                 </a:solidFill>
@@ -26677,6 +26887,12 @@
               </a:rPr>
               <a:t>SimpleCNN</a:t>
             </a:r>
+            <a:endParaRPr sz="1700" b="1" dirty="0">
+              <a:solidFill>
+                <a:srgbClr val="0D2B55"/>
+              </a:solidFill>
+              <a:latin typeface="Calibri"/>
+            </a:endParaRPr>
           </a:p>
           <a:p>
             <a:pPr>
@@ -26685,7 +26901,7 @@
               </a:spcBef>
             </a:pPr>
             <a:r>
-              <a:rPr sz="1500" b="0">
+              <a:rPr sz="1500" b="0" dirty="0">
                 <a:solidFill>
                   <a:srgbClr val="1A1A2E"/>
                 </a:solidFill>
@@ -26701,13 +26917,31 @@
               </a:spcBef>
             </a:pPr>
             <a:r>
-              <a:rPr sz="1500" b="0">
+              <a:rPr sz="1500" b="0" dirty="0">
                 <a:solidFill>
                   <a:srgbClr val="1A1A2E"/>
                 </a:solidFill>
                 <a:latin typeface="Calibri"/>
               </a:rPr>
-              <a:t>▸  Converges in 11 epochs  ·  4.5 M params</a:t>
+              <a:t>▸  Converges in 1</a:t>
+            </a:r>
+            <a:r>
+              <a:rPr lang="en-US" sz="1500" b="0" dirty="0">
+                <a:solidFill>
+                  <a:srgbClr val="1A1A2E"/>
+                </a:solidFill>
+                <a:latin typeface="Calibri"/>
+              </a:rPr>
+              <a:t>2</a:t>
+            </a:r>
+            <a:r>
+              <a:rPr sz="1500" b="0" dirty="0">
+                <a:solidFill>
+                  <a:srgbClr val="1A1A2E"/>
+                </a:solidFill>
+                <a:latin typeface="Calibri"/>
+              </a:rPr>
+              <a:t> epochs  ·  4.5 M params</a:t>
             </a:r>
           </a:p>
           <a:p>
@@ -26717,7 +26951,7 @@
               </a:spcBef>
             </a:pPr>
             <a:r>
-              <a:rPr sz="1500" b="0">
+              <a:rPr sz="1500" b="0" dirty="0">
                 <a:solidFill>
                   <a:srgbClr val="1A1A2E"/>
                 </a:solidFill>
@@ -26733,7 +26967,7 @@
               </a:spcBef>
             </a:pPr>
             <a:r>
-              <a:rPr sz="1500" b="0">
+              <a:rPr sz="1500" b="0" dirty="0">
                 <a:solidFill>
                   <a:srgbClr val="1A1A2E"/>
                 </a:solidFill>
@@ -26749,7 +26983,7 @@
               </a:spcBef>
             </a:pPr>
             <a:r>
-              <a:rPr sz="1700" b="1">
+              <a:rPr sz="1700" b="1" dirty="0">
                 <a:solidFill>
                   <a:srgbClr val="0D2B55"/>
                 </a:solidFill>
@@ -26765,7 +26999,7 @@
               </a:spcBef>
             </a:pPr>
             <a:r>
-              <a:rPr sz="1500" b="0">
+              <a:rPr sz="1500" b="0" dirty="0">
                 <a:solidFill>
                   <a:srgbClr val="1A1A2E"/>
                 </a:solidFill>
@@ -26781,7 +27015,7 @@
               </a:spcBef>
             </a:pPr>
             <a:r>
-              <a:rPr sz="1500" b="0">
+              <a:rPr sz="1500" b="0" dirty="0">
                 <a:solidFill>
                   <a:srgbClr val="1A1A2E"/>
                 </a:solidFill>
@@ -26797,13 +27031,31 @@
               </a:spcBef>
             </a:pPr>
             <a:r>
-              <a:rPr sz="1500" b="0">
+              <a:rPr sz="1500" b="0" dirty="0">
                 <a:solidFill>
                   <a:srgbClr val="1A1A2E"/>
                 </a:solidFill>
                 <a:latin typeface="Calibri"/>
               </a:rPr>
-              <a:t>▸  +6.87 pp over SimpleCNN across all classes</a:t>
+              <a:t>▸  +6.87 pp over </a:t>
+            </a:r>
+            <a:r>
+              <a:rPr sz="1500" b="0" dirty="0" err="1">
+                <a:solidFill>
+                  <a:srgbClr val="1A1A2E"/>
+                </a:solidFill>
+                <a:latin typeface="Calibri"/>
+              </a:rPr>
+              <a:t>SimpleCNN</a:t>
+            </a:r>
+            <a:r>
+              <a:rPr sz="1500" b="0" dirty="0">
+                <a:solidFill>
+                  <a:srgbClr val="1A1A2E"/>
+                </a:solidFill>
+                <a:latin typeface="Calibri"/>
+              </a:rPr>
+              <a:t> across all classes</a:t>
             </a:r>
           </a:p>
         </p:txBody>
